--- a/presentation/battleship-zk-demo.pptx
+++ b/presentation/battleship-zk-demo.pptx
@@ -15,7 +15,7 @@
     <p:sldId id="263" r:id="rId15"/>
     <p:sldId id="264" r:id="rId16"/>
   </p:sldIdLst>
-  <p:sldSz cx="12191695" cy="6858000" type="screen4x3"/>
+  <p:sldSz cx="12191695" cy="6858000" type="custom"/>
   <p:notesSz cx="6858000" cy="9144000"/>
   <p:defaultTextStyle>
     <a:defPPr>
@@ -4266,7 +4266,9 @@
                 <a:solidFill>
                   <a:srgbClr val="38BDF8"/>
                 </a:solidFill>
-                <a:latin typeface="Inter"/>
+                <a:latin typeface="Inter" panose="020B0604020202020204" pitchFamily="34" charset="0"/>
+                <a:ea typeface="+mn-ea"/>
+                <a:cs typeface="+mn-cs"/>
               </a:rPr>
               <a:t>A ZERO-KNOWLEDGE DEMO   ·   BLOCKCHAIN CLUB</a:t>
             </a:r>
@@ -4301,7 +4303,9 @@
                 <a:solidFill>
                   <a:srgbClr val="F8FAFC"/>
                 </a:solidFill>
-                <a:latin typeface="Inter"/>
+                <a:latin typeface="Inter" panose="020B0604020202020204" pitchFamily="34" charset="0"/>
+                <a:ea typeface="+mn-ea"/>
+                <a:cs typeface="+mn-cs"/>
               </a:rPr>
               <a:t>Battleship,</a:t>
             </a:r>
@@ -4336,7 +4340,9 @@
                 <a:solidFill>
                   <a:srgbClr val="F97316"/>
                 </a:solidFill>
-                <a:latin typeface="Inter"/>
+                <a:latin typeface="Inter" panose="020B0604020202020204" pitchFamily="34" charset="0"/>
+                <a:ea typeface="+mn-ea"/>
+                <a:cs typeface="+mn-cs"/>
               </a:rPr>
               <a:t>proven.</a:t>
             </a:r>
@@ -4371,7 +4377,9 @@
                 <a:solidFill>
                   <a:srgbClr val="94A3B8"/>
                 </a:solidFill>
-                <a:latin typeface="Inter"/>
+                <a:latin typeface="Inter" panose="020B0604020202020204" pitchFamily="34" charset="0"/>
+                <a:ea typeface="+mn-ea"/>
+                <a:cs typeface="+mn-cs"/>
               </a:rPr>
               <a:t>A zk-SNARK demo with real on-chain verification.</a:t>
             </a:r>
@@ -4496,7 +4504,9 @@
                 <a:solidFill>
                   <a:srgbClr val="F8FAFC"/>
                 </a:solidFill>
-                <a:latin typeface="Inter"/>
+                <a:latin typeface="Inter" panose="020B0604020202020204" pitchFamily="34" charset="0"/>
+                <a:ea typeface="+mn-ea"/>
+                <a:cs typeface="+mn-cs"/>
               </a:rPr>
               <a:t>VIKRAM AKKALA    ·    PRANAV PABBA</a:t>
             </a:r>
@@ -4531,7 +4541,9 @@
                 <a:solidFill>
                   <a:srgbClr val="94A3B8"/>
                 </a:solidFill>
-                <a:latin typeface="JetBrains Mono"/>
+                <a:latin typeface="JetBrains Mono" panose="02070609020202020204" pitchFamily="49" charset="0"/>
+                <a:ea typeface="+mn-ea"/>
+                <a:cs typeface="+mn-cs"/>
               </a:rPr>
               <a:t>noir → ultrahonk → solidity</a:t>
             </a:r>
@@ -4652,7 +4664,9 @@
                 <a:solidFill>
                   <a:srgbClr val="94A3B8"/>
                 </a:solidFill>
-                <a:latin typeface="JetBrains Mono"/>
+                <a:latin typeface="JetBrains Mono" panose="02070609020202020204" pitchFamily="49" charset="0"/>
+                <a:ea typeface="+mn-ea"/>
+                <a:cs typeface="+mn-cs"/>
               </a:rPr>
               <a:t>01 / 09</a:t>
             </a:r>
@@ -4748,7 +4762,9 @@
                 <a:solidFill>
                   <a:srgbClr val="38BDF8"/>
                 </a:solidFill>
-                <a:latin typeface="Inter"/>
+                <a:latin typeface="Inter" panose="020B0604020202020204" pitchFamily="34" charset="0"/>
+                <a:ea typeface="+mn-ea"/>
+                <a:cs typeface="+mn-cs"/>
               </a:rPr>
               <a:t>01  ·  THE PROBLEM</a:t>
             </a:r>
@@ -4783,7 +4799,9 @@
                 <a:solidFill>
                   <a:srgbClr val="F8FAFC"/>
                 </a:solidFill>
-                <a:latin typeface="Inter"/>
+                <a:latin typeface="Inter" panose="020B0604020202020204" pitchFamily="34" charset="0"/>
+                <a:ea typeface="+mn-ea"/>
+                <a:cs typeface="+mn-cs"/>
               </a:rPr>
               <a:t>A game built on hidden state.</a:t>
             </a:r>
@@ -4860,7 +4878,9 @@
                 <a:solidFill>
                   <a:srgbClr val="94A3B8"/>
                 </a:solidFill>
-                <a:latin typeface="JetBrains Mono"/>
+                <a:latin typeface="JetBrains Mono" panose="02070609020202020204" pitchFamily="49" charset="0"/>
+                <a:ea typeface="+mn-ea"/>
+                <a:cs typeface="+mn-cs"/>
               </a:rPr>
               <a:t>battleship</a:t>
             </a:r>
@@ -4869,7 +4889,9 @@
                 <a:solidFill>
                   <a:srgbClr val="F97316"/>
                 </a:solidFill>
-                <a:latin typeface="JetBrains Mono"/>
+                <a:latin typeface="JetBrains Mono" panose="02070609020202020204" pitchFamily="49" charset="0"/>
+                <a:ea typeface="+mn-ea"/>
+                <a:cs typeface="+mn-cs"/>
               </a:rPr>
               <a:t>.zk</a:t>
             </a:r>
@@ -4990,7 +5012,9 @@
                 <a:solidFill>
                   <a:srgbClr val="94A3B8"/>
                 </a:solidFill>
-                <a:latin typeface="JetBrains Mono"/>
+                <a:latin typeface="JetBrains Mono" panose="02070609020202020204" pitchFamily="49" charset="0"/>
+                <a:ea typeface="+mn-ea"/>
+                <a:cs typeface="+mn-cs"/>
               </a:rPr>
               <a:t>02 / 09</a:t>
             </a:r>
@@ -5025,7 +5049,9 @@
                 <a:solidFill>
                   <a:srgbClr val="F97316"/>
                 </a:solidFill>
-                <a:latin typeface="Inter"/>
+                <a:latin typeface="Inter" panose="020B0604020202020204" pitchFamily="34" charset="0"/>
+                <a:ea typeface="+mn-ea"/>
+                <a:cs typeface="+mn-cs"/>
               </a:rPr>
               <a:t>“</a:t>
             </a:r>
@@ -5064,7 +5090,9 @@
                 <a:solidFill>
                   <a:srgbClr val="F8FAFC"/>
                 </a:solidFill>
-                <a:latin typeface="Inter"/>
+                <a:latin typeface="Inter" panose="020B0604020202020204" pitchFamily="34" charset="0"/>
+                <a:ea typeface="+mn-ea"/>
+                <a:cs typeface="+mn-cs"/>
               </a:rPr>
               <a:t>Each player knows their board.</a:t>
             </a:r>
@@ -5080,7 +5108,9 @@
                 <a:solidFill>
                   <a:srgbClr val="F97316"/>
                 </a:solidFill>
-                <a:latin typeface="Inter"/>
+                <a:latin typeface="Inter" panose="020B0604020202020204" pitchFamily="34" charset="0"/>
+                <a:ea typeface="+mn-ea"/>
+                <a:cs typeface="+mn-cs"/>
               </a:rPr>
               <a:t>Neither player trusts the other.</a:t>
             </a:r>
@@ -5115,7 +5145,9 @@
                 <a:solidFill>
                   <a:srgbClr val="94A3B8"/>
                 </a:solidFill>
-                <a:latin typeface="Inter"/>
+                <a:latin typeface="Inter" panose="020B0604020202020204" pitchFamily="34" charset="0"/>
+                <a:ea typeface="+mn-ea"/>
+                <a:cs typeface="+mn-cs"/>
               </a:rPr>
               <a:t>— standard trick: commit to your board with a hash so you can't change your mind later.</a:t>
             </a:r>
@@ -5150,7 +5182,9 @@
                 <a:solidFill>
                   <a:srgbClr val="94A3B8"/>
                 </a:solidFill>
-                <a:latin typeface="Inter"/>
+                <a:latin typeface="Inter" panose="020B0604020202020204" pitchFamily="34" charset="0"/>
+                <a:ea typeface="+mn-ea"/>
+                <a:cs typeface="+mn-cs"/>
               </a:rPr>
               <a:t>But a hash commitment only proves WHAT you committed to -- not whether what you committed is legal.</a:t>
             </a:r>
@@ -5246,7 +5280,9 @@
                 <a:solidFill>
                   <a:srgbClr val="38BDF8"/>
                 </a:solidFill>
-                <a:latin typeface="Inter"/>
+                <a:latin typeface="Inter" panose="020B0604020202020204" pitchFamily="34" charset="0"/>
+                <a:ea typeface="+mn-ea"/>
+                <a:cs typeface="+mn-cs"/>
               </a:rPr>
               <a:t>02  ·  THE VALIDITY GAP</a:t>
             </a:r>
@@ -5281,7 +5317,9 @@
                 <a:solidFill>
                   <a:srgbClr val="F8FAFC"/>
                 </a:solidFill>
-                <a:latin typeface="Inter"/>
+                <a:latin typeface="Inter" panose="020B0604020202020204" pitchFamily="34" charset="0"/>
+                <a:ea typeface="+mn-ea"/>
+                <a:cs typeface="+mn-cs"/>
               </a:rPr>
               <a:t>Commit to nothing. Win anyway.</a:t>
             </a:r>
@@ -5358,7 +5396,9 @@
                 <a:solidFill>
                   <a:srgbClr val="94A3B8"/>
                 </a:solidFill>
-                <a:latin typeface="JetBrains Mono"/>
+                <a:latin typeface="JetBrains Mono" panose="02070609020202020204" pitchFamily="49" charset="0"/>
+                <a:ea typeface="+mn-ea"/>
+                <a:cs typeface="+mn-cs"/>
               </a:rPr>
               <a:t>battleship</a:t>
             </a:r>
@@ -5367,7 +5407,9 @@
                 <a:solidFill>
                   <a:srgbClr val="F97316"/>
                 </a:solidFill>
-                <a:latin typeface="JetBrains Mono"/>
+                <a:latin typeface="JetBrains Mono" panose="02070609020202020204" pitchFamily="49" charset="0"/>
+                <a:ea typeface="+mn-ea"/>
+                <a:cs typeface="+mn-cs"/>
               </a:rPr>
               <a:t>.zk</a:t>
             </a:r>
@@ -5488,7 +5530,9 @@
                 <a:solidFill>
                   <a:srgbClr val="94A3B8"/>
                 </a:solidFill>
-                <a:latin typeface="JetBrains Mono"/>
+                <a:latin typeface="JetBrains Mono" panose="02070609020202020204" pitchFamily="49" charset="0"/>
+                <a:ea typeface="+mn-ea"/>
+                <a:cs typeface="+mn-cs"/>
               </a:rPr>
               <a:t>03 / 09</a:t>
             </a:r>
@@ -10070,7 +10114,9 @@
                 <a:solidFill>
                   <a:srgbClr val="F87171"/>
                 </a:solidFill>
-                <a:latin typeface="Inter"/>
+                <a:latin typeface="Inter" panose="020B0604020202020204" pitchFamily="34" charset="0"/>
+                <a:ea typeface="+mn-ea"/>
+                <a:cs typeface="+mn-cs"/>
               </a:rPr>
               <a:t>ALL-EMPTY BOARD</a:t>
             </a:r>
@@ -10105,7 +10151,9 @@
                 <a:solidFill>
                   <a:srgbClr val="94A3B8"/>
                 </a:solidFill>
-                <a:latin typeface="JetBrains Mono"/>
+                <a:latin typeface="JetBrains Mono" panose="02070609020202020204" pitchFamily="49" charset="0"/>
+                <a:ea typeface="+mn-ea"/>
+                <a:cs typeface="+mn-cs"/>
               </a:rPr>
               <a:t>hash(empty, salt) is still valid</a:t>
             </a:r>
@@ -10140,7 +10188,9 @@
                 <a:solidFill>
                   <a:srgbClr val="F87171"/>
                 </a:solidFill>
-                <a:latin typeface="Inter"/>
+                <a:latin typeface="Inter" panose="020B0604020202020204" pitchFamily="34" charset="0"/>
+                <a:ea typeface="+mn-ea"/>
+                <a:cs typeface="+mn-cs"/>
               </a:rPr>
               <a:t>THE CHEAT</a:t>
             </a:r>
@@ -10218,7 +10268,9 @@
                 <a:solidFill>
                   <a:srgbClr val="0A0F1A"/>
                 </a:solidFill>
-                <a:latin typeface="Inter"/>
+                <a:latin typeface="Inter" panose="020B0604020202020204" pitchFamily="34" charset="0"/>
+                <a:ea typeface="+mn-ea"/>
+                <a:cs typeface="+mn-cs"/>
               </a:rPr>
               <a:t>1</a:t>
             </a:r>
@@ -10253,7 +10305,9 @@
                 <a:solidFill>
                   <a:srgbClr val="F8FAFC"/>
                 </a:solidFill>
-                <a:latin typeface="Inter"/>
+                <a:latin typeface="Inter" panose="020B0604020202020204" pitchFamily="34" charset="0"/>
+                <a:ea typeface="+mn-ea"/>
+                <a:cs typeface="+mn-cs"/>
               </a:rPr>
               <a:t>Commit to an all-empty board.</a:t>
             </a:r>
@@ -10288,7 +10342,9 @@
                 <a:solidFill>
                   <a:srgbClr val="94A3B8"/>
                 </a:solidFill>
-                <a:latin typeface="Inter"/>
+                <a:latin typeface="Inter" panose="020B0604020202020204" pitchFamily="34" charset="0"/>
+                <a:ea typeface="+mn-ea"/>
+                <a:cs typeface="+mn-cs"/>
               </a:rPr>
               <a:t>hash is valid. nothing in the scheme says you need ships.</a:t>
             </a:r>
@@ -10366,7 +10422,9 @@
                 <a:solidFill>
                   <a:srgbClr val="0A0F1A"/>
                 </a:solidFill>
-                <a:latin typeface="Inter"/>
+                <a:latin typeface="Inter" panose="020B0604020202020204" pitchFamily="34" charset="0"/>
+                <a:ea typeface="+mn-ea"/>
+                <a:cs typeface="+mn-cs"/>
               </a:rPr>
               <a:t>2</a:t>
             </a:r>
@@ -10401,7 +10459,9 @@
                 <a:solidFill>
                   <a:srgbClr val="F8FAFC"/>
                 </a:solidFill>
-                <a:latin typeface="Inter"/>
+                <a:latin typeface="Inter" panose="020B0604020202020204" pitchFamily="34" charset="0"/>
+                <a:ea typeface="+mn-ea"/>
+                <a:cs typeface="+mn-cs"/>
               </a:rPr>
               <a:t>Opponent fires at (3, 5).</a:t>
             </a:r>
@@ -10436,7 +10496,9 @@
                 <a:solidFill>
                   <a:srgbClr val="94A3B8"/>
                 </a:solidFill>
-                <a:latin typeface="Inter"/>
+                <a:latin typeface="Inter" panose="020B0604020202020204" pitchFamily="34" charset="0"/>
+                <a:ea typeface="+mn-ea"/>
+                <a:cs typeface="+mn-cs"/>
               </a:rPr>
               <a:t>you answer MISS. truthfully. there is nothing there.</a:t>
             </a:r>
@@ -10514,7 +10576,9 @@
                 <a:solidFill>
                   <a:srgbClr val="0A0F1A"/>
                 </a:solidFill>
-                <a:latin typeface="Inter"/>
+                <a:latin typeface="Inter" panose="020B0604020202020204" pitchFamily="34" charset="0"/>
+                <a:ea typeface="+mn-ea"/>
+                <a:cs typeface="+mn-cs"/>
               </a:rPr>
               <a:t>3</a:t>
             </a:r>
@@ -10549,7 +10613,9 @@
                 <a:solidFill>
                   <a:srgbClr val="F8FAFC"/>
                 </a:solidFill>
-                <a:latin typeface="Inter"/>
+                <a:latin typeface="Inter" panose="020B0604020202020204" pitchFamily="34" charset="0"/>
+                <a:ea typeface="+mn-ea"/>
+                <a:cs typeface="+mn-cs"/>
               </a:rPr>
               <a:t>Every shot is a miss.</a:t>
             </a:r>
@@ -10584,7 +10650,9 @@
                 <a:solidFill>
                   <a:srgbClr val="94A3B8"/>
                 </a:solidFill>
-                <a:latin typeface="Inter"/>
+                <a:latin typeface="Inter" panose="020B0604020202020204" pitchFamily="34" charset="0"/>
+                <a:ea typeface="+mn-ea"/>
+                <a:cs typeface="+mn-cs"/>
               </a:rPr>
               <a:t>you never lose a cell. you never take damage.</a:t>
             </a:r>
@@ -10662,7 +10730,9 @@
                 <a:solidFill>
                   <a:srgbClr val="0A0F1A"/>
                 </a:solidFill>
-                <a:latin typeface="Inter"/>
+                <a:latin typeface="Inter" panose="020B0604020202020204" pitchFamily="34" charset="0"/>
+                <a:ea typeface="+mn-ea"/>
+                <a:cs typeface="+mn-cs"/>
               </a:rPr>
               <a:t>4</a:t>
             </a:r>
@@ -10697,7 +10767,9 @@
                 <a:solidFill>
                   <a:srgbClr val="F8FAFC"/>
                 </a:solidFill>
-                <a:latin typeface="Inter"/>
+                <a:latin typeface="Inter" panose="020B0604020202020204" pitchFamily="34" charset="0"/>
+                <a:ea typeface="+mn-ea"/>
+                <a:cs typeface="+mn-cs"/>
               </a:rPr>
               <a:t>You win by elimination.</a:t>
             </a:r>
@@ -10732,7 +10804,9 @@
                 <a:solidFill>
                   <a:srgbClr val="94A3B8"/>
                 </a:solidFill>
-                <a:latin typeface="Inter"/>
+                <a:latin typeface="Inter" panose="020B0604020202020204" pitchFamily="34" charset="0"/>
+                <a:ea typeface="+mn-ea"/>
+                <a:cs typeface="+mn-cs"/>
               </a:rPr>
               <a:t>hash commitments alone cannot stop this.</a:t>
             </a:r>
@@ -10828,7 +10902,9 @@
                 <a:solidFill>
                   <a:srgbClr val="38BDF8"/>
                 </a:solidFill>
-                <a:latin typeface="Inter"/>
+                <a:latin typeface="Inter" panose="020B0604020202020204" pitchFamily="34" charset="0"/>
+                <a:ea typeface="+mn-ea"/>
+                <a:cs typeface="+mn-cs"/>
               </a:rPr>
               <a:t>03  ·  THE FIX</a:t>
             </a:r>
@@ -10863,7 +10939,9 @@
                 <a:solidFill>
                   <a:srgbClr val="F8FAFC"/>
                 </a:solidFill>
-                <a:latin typeface="Inter"/>
+                <a:latin typeface="Inter" panose="020B0604020202020204" pitchFamily="34" charset="0"/>
+                <a:ea typeface="+mn-ea"/>
+                <a:cs typeface="+mn-cs"/>
               </a:rPr>
               <a:t>Prove legality, in zero knowledge.</a:t>
             </a:r>
@@ -10940,7 +11018,9 @@
                 <a:solidFill>
                   <a:srgbClr val="94A3B8"/>
                 </a:solidFill>
-                <a:latin typeface="JetBrains Mono"/>
+                <a:latin typeface="JetBrains Mono" panose="02070609020202020204" pitchFamily="49" charset="0"/>
+                <a:ea typeface="+mn-ea"/>
+                <a:cs typeface="+mn-cs"/>
               </a:rPr>
               <a:t>battleship</a:t>
             </a:r>
@@ -10949,7 +11029,9 @@
                 <a:solidFill>
                   <a:srgbClr val="F97316"/>
                 </a:solidFill>
-                <a:latin typeface="JetBrains Mono"/>
+                <a:latin typeface="JetBrains Mono" panose="02070609020202020204" pitchFamily="49" charset="0"/>
+                <a:ea typeface="+mn-ea"/>
+                <a:cs typeface="+mn-cs"/>
               </a:rPr>
               <a:t>.zk</a:t>
             </a:r>
@@ -11070,7 +11152,9 @@
                 <a:solidFill>
                   <a:srgbClr val="94A3B8"/>
                 </a:solidFill>
-                <a:latin typeface="JetBrains Mono"/>
+                <a:latin typeface="JetBrains Mono" panose="02070609020202020204" pitchFamily="49" charset="0"/>
+                <a:ea typeface="+mn-ea"/>
+                <a:cs typeface="+mn-cs"/>
               </a:rPr>
               <a:t>04 / 09</a:t>
             </a:r>
@@ -11105,7 +11189,9 @@
                 <a:solidFill>
                   <a:srgbClr val="F97316"/>
                 </a:solidFill>
-                <a:latin typeface="Inter"/>
+                <a:latin typeface="Inter" panose="020B0604020202020204" pitchFamily="34" charset="0"/>
+                <a:ea typeface="+mn-ea"/>
+                <a:cs typeface="+mn-cs"/>
               </a:rPr>
               <a:t>The proof IS the validity certificate.</a:t>
             </a:r>
@@ -11140,7 +11226,9 @@
                 <a:solidFill>
                   <a:srgbClr val="F8FAFC"/>
                 </a:solidFill>
-                <a:latin typeface="Inter"/>
+                <a:latin typeface="Inter" panose="020B0604020202020204" pitchFamily="34" charset="0"/>
+                <a:ea typeface="+mn-ea"/>
+                <a:cs typeface="+mn-cs"/>
               </a:rPr>
               <a:t>One zk-SNARK, generated in the browser before the first shot.</a:t>
             </a:r>
@@ -11175,7 +11263,9 @@
                 <a:solidFill>
                   <a:srgbClr val="94A3B8"/>
                 </a:solidFill>
-                <a:latin typeface="Inter"/>
+                <a:latin typeface="Inter" panose="020B0604020202020204" pitchFamily="34" charset="0"/>
+                <a:ea typeface="+mn-ea"/>
+                <a:cs typeface="+mn-cs"/>
               </a:rPr>
               <a:t>Verified once on-chain. No ship-count lies survive.</a:t>
             </a:r>
@@ -11257,7 +11347,9 @@
                 <a:solidFill>
                   <a:srgbClr val="38BDF8"/>
                 </a:solidFill>
-                <a:latin typeface="Inter"/>
+                <a:latin typeface="Inter" panose="020B0604020202020204" pitchFamily="34" charset="0"/>
+                <a:ea typeface="+mn-ea"/>
+                <a:cs typeface="+mn-cs"/>
               </a:rPr>
               <a:t>THE FLEET CONSTRAINT</a:t>
             </a:r>
@@ -11292,7 +11384,9 @@
                 <a:solidFill>
                   <a:srgbClr val="F8FAFC"/>
                 </a:solidFill>
-                <a:latin typeface="JetBrains Mono"/>
+                <a:latin typeface="JetBrains Mono" panose="02070609020202020204" pitchFamily="49" charset="0"/>
+                <a:ea typeface="+mn-ea"/>
+                <a:cs typeface="+mn-cs"/>
               </a:rPr>
               <a:t>17 cells  -  1x5  -  1x4  -  2x3  -  1x2  -  no overlaps  -  no diagonals</a:t>
             </a:r>
@@ -11388,7 +11482,9 @@
                 <a:solidFill>
                   <a:srgbClr val="38BDF8"/>
                 </a:solidFill>
-                <a:latin typeface="Inter"/>
+                <a:latin typeface="Inter" panose="020B0604020202020204" pitchFamily="34" charset="0"/>
+                <a:ea typeface="+mn-ea"/>
+                <a:cs typeface="+mn-cs"/>
               </a:rPr>
               <a:t>04  ·  THE STACK</a:t>
             </a:r>
@@ -11423,7 +11519,9 @@
                 <a:solidFill>
                   <a:srgbClr val="F8FAFC"/>
                 </a:solidFill>
-                <a:latin typeface="Inter"/>
+                <a:latin typeface="Inter" panose="020B0604020202020204" pitchFamily="34" charset="0"/>
+                <a:ea typeface="+mn-ea"/>
+                <a:cs typeface="+mn-cs"/>
               </a:rPr>
               <a:t>Noir + UltraHonk.</a:t>
             </a:r>
@@ -11500,7 +11598,9 @@
                 <a:solidFill>
                   <a:srgbClr val="94A3B8"/>
                 </a:solidFill>
-                <a:latin typeface="JetBrains Mono"/>
+                <a:latin typeface="JetBrains Mono" panose="02070609020202020204" pitchFamily="49" charset="0"/>
+                <a:ea typeface="+mn-ea"/>
+                <a:cs typeface="+mn-cs"/>
               </a:rPr>
               <a:t>battleship</a:t>
             </a:r>
@@ -11509,7 +11609,9 @@
                 <a:solidFill>
                   <a:srgbClr val="F97316"/>
                 </a:solidFill>
-                <a:latin typeface="JetBrains Mono"/>
+                <a:latin typeface="JetBrains Mono" panose="02070609020202020204" pitchFamily="49" charset="0"/>
+                <a:ea typeface="+mn-ea"/>
+                <a:cs typeface="+mn-cs"/>
               </a:rPr>
               <a:t>.zk</a:t>
             </a:r>
@@ -11630,7 +11732,9 @@
                 <a:solidFill>
                   <a:srgbClr val="94A3B8"/>
                 </a:solidFill>
-                <a:latin typeface="JetBrains Mono"/>
+                <a:latin typeface="JetBrains Mono" panose="02070609020202020204" pitchFamily="49" charset="0"/>
+                <a:ea typeface="+mn-ea"/>
+                <a:cs typeface="+mn-cs"/>
               </a:rPr>
               <a:t>05 / 09</a:t>
             </a:r>
@@ -11712,7 +11816,9 @@
                 <a:solidFill>
                   <a:srgbClr val="F97316"/>
                 </a:solidFill>
-                <a:latin typeface="JetBrains Mono"/>
+                <a:latin typeface="JetBrains Mono" panose="02070609020202020204" pitchFamily="49" charset="0"/>
+                <a:ea typeface="+mn-ea"/>
+                <a:cs typeface="+mn-cs"/>
               </a:rPr>
               <a:t>NOIR</a:t>
             </a:r>
@@ -11747,7 +11853,9 @@
                 <a:solidFill>
                   <a:srgbClr val="F8FAFC"/>
                 </a:solidFill>
-                <a:latin typeface="Inter"/>
+                <a:latin typeface="Inter" panose="020B0604020202020204" pitchFamily="34" charset="0"/>
+                <a:ea typeface="+mn-ea"/>
+                <a:cs typeface="+mn-cs"/>
               </a:rPr>
               <a:t>Rust-like zk DSL</a:t>
             </a:r>
@@ -11786,7 +11894,9 @@
                 <a:solidFill>
                   <a:srgbClr val="94A3B8"/>
                 </a:solidFill>
-                <a:latin typeface="Inter"/>
+                <a:latin typeface="Inter" panose="020B0604020202020204" pitchFamily="34" charset="0"/>
+                <a:ea typeface="+mn-ea"/>
+                <a:cs typeface="+mn-cs"/>
               </a:rPr>
               <a:t>Readable circuits.</a:t>
             </a:r>
@@ -11802,7 +11912,9 @@
                 <a:solidFill>
                   <a:srgbClr val="94A3B8"/>
                 </a:solidFill>
-                <a:latin typeface="Inter"/>
+                <a:latin typeface="Inter" panose="020B0604020202020204" pitchFamily="34" charset="0"/>
+                <a:ea typeface="+mn-ea"/>
+                <a:cs typeface="+mn-cs"/>
               </a:rPr>
               <a:t>Compiles to arithmetic constraints.</a:t>
             </a:r>
@@ -11818,7 +11930,9 @@
                 <a:solidFill>
                   <a:srgbClr val="94A3B8"/>
                 </a:solidFill>
-                <a:latin typeface="Inter"/>
+                <a:latin typeface="Inter" panose="020B0604020202020204" pitchFamily="34" charset="0"/>
+                <a:ea typeface="+mn-ea"/>
+                <a:cs typeface="+mn-cs"/>
               </a:rPr>
               <a:t>WASM prover runs in the browser.</a:t>
             </a:r>
@@ -11900,7 +12014,9 @@
                 <a:solidFill>
                   <a:srgbClr val="F97316"/>
                 </a:solidFill>
-                <a:latin typeface="JetBrains Mono"/>
+                <a:latin typeface="JetBrains Mono" panose="02070609020202020204" pitchFamily="49" charset="0"/>
+                <a:ea typeface="+mn-ea"/>
+                <a:cs typeface="+mn-cs"/>
               </a:rPr>
               <a:t>ULTRAHONK</a:t>
             </a:r>
@@ -11935,7 +12051,9 @@
                 <a:solidFill>
                   <a:srgbClr val="F8FAFC"/>
                 </a:solidFill>
-                <a:latin typeface="Inter"/>
+                <a:latin typeface="Inter" panose="020B0604020202020204" pitchFamily="34" charset="0"/>
+                <a:ea typeface="+mn-ea"/>
+                <a:cs typeface="+mn-cs"/>
               </a:rPr>
               <a:t>PLONK-family backend</a:t>
             </a:r>
@@ -11974,7 +12092,9 @@
                 <a:solidFill>
                   <a:srgbClr val="94A3B8"/>
                 </a:solidFill>
-                <a:latin typeface="Inter"/>
+                <a:latin typeface="Inter" panose="020B0604020202020204" pitchFamily="34" charset="0"/>
+                <a:ea typeface="+mn-ea"/>
+                <a:cs typeface="+mn-cs"/>
               </a:rPr>
               <a:t>Aztec's modern proof system.</a:t>
             </a:r>
@@ -11990,7 +12110,9 @@
                 <a:solidFill>
                   <a:srgbClr val="94A3B8"/>
                 </a:solidFill>
-                <a:latin typeface="Inter"/>
+                <a:latin typeface="Inter" panose="020B0604020202020204" pitchFamily="34" charset="0"/>
+                <a:ea typeface="+mn-ea"/>
+                <a:cs typeface="+mn-cs"/>
               </a:rPr>
               <a:t>No trusted setup ceremony.</a:t>
             </a:r>
@@ -12006,7 +12128,9 @@
                 <a:solidFill>
                   <a:srgbClr val="94A3B8"/>
                 </a:solidFill>
-                <a:latin typeface="Inter"/>
+                <a:latin typeface="Inter" panose="020B0604020202020204" pitchFamily="34" charset="0"/>
+                <a:ea typeface="+mn-ea"/>
+                <a:cs typeface="+mn-cs"/>
               </a:rPr>
               <a:t>No powers-of-tau, no toxic waste.</a:t>
             </a:r>
@@ -12088,7 +12212,9 @@
                 <a:solidFill>
                   <a:srgbClr val="F97316"/>
                 </a:solidFill>
-                <a:latin typeface="JetBrains Mono"/>
+                <a:latin typeface="JetBrains Mono" panose="02070609020202020204" pitchFamily="49" charset="0"/>
+                <a:ea typeface="+mn-ea"/>
+                <a:cs typeface="+mn-cs"/>
               </a:rPr>
               <a:t>PEDERSEN HASH</a:t>
             </a:r>
@@ -12123,7 +12249,9 @@
                 <a:solidFill>
                   <a:srgbClr val="F8FAFC"/>
                 </a:solidFill>
-                <a:latin typeface="Inter"/>
+                <a:latin typeface="Inter" panose="020B0604020202020204" pitchFamily="34" charset="0"/>
+                <a:ea typeface="+mn-ea"/>
+                <a:cs typeface="+mn-cs"/>
               </a:rPr>
               <a:t>In-circuit commitment</a:t>
             </a:r>
@@ -12162,7 +12290,9 @@
                 <a:solidFill>
                   <a:srgbClr val="94A3B8"/>
                 </a:solidFill>
-                <a:latin typeface="Inter"/>
+                <a:latin typeface="Inter" panose="020B0604020202020204" pitchFamily="34" charset="0"/>
+                <a:ea typeface="+mn-ea"/>
+                <a:cs typeface="+mn-cs"/>
               </a:rPr>
               <a:t>Cheap to compute inside zk.</a:t>
             </a:r>
@@ -12178,7 +12308,9 @@
                 <a:solidFill>
                   <a:srgbClr val="94A3B8"/>
                 </a:solidFill>
-                <a:latin typeface="Inter"/>
+                <a:latin typeface="Inter" panose="020B0604020202020204" pitchFamily="34" charset="0"/>
+                <a:ea typeface="+mn-ea"/>
+                <a:cs typeface="+mn-cs"/>
               </a:rPr>
               <a:t>Binds 100 cells + salt.</a:t>
             </a:r>
@@ -12194,7 +12326,9 @@
                 <a:solidFill>
                   <a:srgbClr val="94A3B8"/>
                 </a:solidFill>
-                <a:latin typeface="Inter"/>
+                <a:latin typeface="Inter" panose="020B0604020202020204" pitchFamily="34" charset="0"/>
+                <a:ea typeface="+mn-ea"/>
+                <a:cs typeface="+mn-cs"/>
               </a:rPr>
               <a:t>One field element, used as the board commit.</a:t>
             </a:r>
@@ -12276,7 +12410,9 @@
                 <a:solidFill>
                   <a:srgbClr val="F97316"/>
                 </a:solidFill>
-                <a:latin typeface="JetBrains Mono"/>
+                <a:latin typeface="JetBrains Mono" panose="02070609020202020204" pitchFamily="49" charset="0"/>
+                <a:ea typeface="+mn-ea"/>
+                <a:cs typeface="+mn-cs"/>
               </a:rPr>
               <a:t>HONKVERIFIER</a:t>
             </a:r>
@@ -12311,7 +12447,9 @@
                 <a:solidFill>
                   <a:srgbClr val="F8FAFC"/>
                 </a:solidFill>
-                <a:latin typeface="Inter"/>
+                <a:latin typeface="Inter" panose="020B0604020202020204" pitchFamily="34" charset="0"/>
+                <a:ea typeface="+mn-ea"/>
+                <a:cs typeface="+mn-cs"/>
               </a:rPr>
               <a:t>Auto-generated Solidity</a:t>
             </a:r>
@@ -12350,7 +12488,9 @@
                 <a:solidFill>
                   <a:srgbClr val="94A3B8"/>
                 </a:solidFill>
-                <a:latin typeface="Inter"/>
+                <a:latin typeface="Inter" panose="020B0604020202020204" pitchFamily="34" charset="0"/>
+                <a:ea typeface="+mn-ea"/>
+                <a:cs typeface="+mn-cs"/>
               </a:rPr>
               <a:t>~2,460 lines of verifier.</a:t>
             </a:r>
@@ -12366,7 +12506,9 @@
                 <a:solidFill>
                   <a:srgbClr val="94A3B8"/>
                 </a:solidFill>
-                <a:latin typeface="Inter"/>
+                <a:latin typeface="Inter" panose="020B0604020202020204" pitchFamily="34" charset="0"/>
+                <a:ea typeface="+mn-ea"/>
+                <a:cs typeface="+mn-cs"/>
               </a:rPr>
               <a:t>~250k gas per verify call.</a:t>
             </a:r>
@@ -12382,7 +12524,9 @@
                 <a:solidFill>
                   <a:srgbClr val="94A3B8"/>
                 </a:solidFill>
-                <a:latin typeface="Inter"/>
+                <a:latin typeface="Inter" panose="020B0604020202020204" pitchFamily="34" charset="0"/>
+                <a:ea typeface="+mn-ea"/>
+                <a:cs typeface="+mn-cs"/>
               </a:rPr>
               <a:t>Dropped straight into the repo.</a:t>
             </a:r>
@@ -12478,7 +12622,9 @@
                 <a:solidFill>
                   <a:srgbClr val="38BDF8"/>
                 </a:solidFill>
-                <a:latin typeface="Inter"/>
+                <a:latin typeface="Inter" panose="020B0604020202020204" pitchFamily="34" charset="0"/>
+                <a:ea typeface="+mn-ea"/>
+                <a:cs typeface="+mn-cs"/>
               </a:rPr>
               <a:t>05  ·  ARCHITECTURE</a:t>
             </a:r>
@@ -12513,7 +12659,9 @@
                 <a:solidFill>
                   <a:srgbClr val="F8FAFC"/>
                 </a:solidFill>
-                <a:latin typeface="Inter"/>
+                <a:latin typeface="Inter" panose="020B0604020202020204" pitchFamily="34" charset="0"/>
+                <a:ea typeface="+mn-ea"/>
+                <a:cs typeface="+mn-cs"/>
               </a:rPr>
               <a:t>Browser proves. Chain verifies.</a:t>
             </a:r>
@@ -12590,7 +12738,9 @@
                 <a:solidFill>
                   <a:srgbClr val="94A3B8"/>
                 </a:solidFill>
-                <a:latin typeface="JetBrains Mono"/>
+                <a:latin typeface="JetBrains Mono" panose="02070609020202020204" pitchFamily="49" charset="0"/>
+                <a:ea typeface="+mn-ea"/>
+                <a:cs typeface="+mn-cs"/>
               </a:rPr>
               <a:t>battleship</a:t>
             </a:r>
@@ -12599,7 +12749,9 @@
                 <a:solidFill>
                   <a:srgbClr val="F97316"/>
                 </a:solidFill>
-                <a:latin typeface="JetBrains Mono"/>
+                <a:latin typeface="JetBrains Mono" panose="02070609020202020204" pitchFamily="49" charset="0"/>
+                <a:ea typeface="+mn-ea"/>
+                <a:cs typeface="+mn-cs"/>
               </a:rPr>
               <a:t>.zk</a:t>
             </a:r>
@@ -12720,7 +12872,9 @@
                 <a:solidFill>
                   <a:srgbClr val="94A3B8"/>
                 </a:solidFill>
-                <a:latin typeface="JetBrains Mono"/>
+                <a:latin typeface="JetBrains Mono" panose="02070609020202020204" pitchFamily="49" charset="0"/>
+                <a:ea typeface="+mn-ea"/>
+                <a:cs typeface="+mn-cs"/>
               </a:rPr>
               <a:t>06 / 09</a:t>
             </a:r>
@@ -12802,7 +12956,9 @@
                 <a:solidFill>
                   <a:srgbClr val="F97316"/>
                 </a:solidFill>
-                <a:latin typeface="JetBrains Mono"/>
+                <a:latin typeface="JetBrains Mono" panose="02070609020202020204" pitchFamily="49" charset="0"/>
+                <a:ea typeface="+mn-ea"/>
+                <a:cs typeface="+mn-cs"/>
               </a:rPr>
               <a:t>FLEET</a:t>
             </a:r>
@@ -12837,7 +12993,9 @@
                 <a:solidFill>
                   <a:srgbClr val="F8FAFC"/>
                 </a:solidFill>
-                <a:latin typeface="Inter"/>
+                <a:latin typeface="Inter" panose="020B0604020202020204" pitchFamily="34" charset="0"/>
+                <a:ea typeface="+mn-ea"/>
+                <a:cs typeface="+mn-cs"/>
               </a:rPr>
               <a:t>Fleet</a:t>
             </a:r>
@@ -12872,7 +13030,9 @@
                 <a:solidFill>
                   <a:srgbClr val="94A3B8"/>
                 </a:solidFill>
-                <a:latin typeface="JetBrains Mono"/>
+                <a:latin typeface="JetBrains Mono" panose="02070609020202020204" pitchFamily="49" charset="0"/>
+                <a:ea typeface="+mn-ea"/>
+                <a:cs typeface="+mn-cs"/>
               </a:rPr>
               <a:t>private[100]</a:t>
             </a:r>
@@ -12954,7 +13114,9 @@
                 <a:solidFill>
                   <a:srgbClr val="F97316"/>
                 </a:solidFill>
-                <a:latin typeface="JetBrains Mono"/>
+                <a:latin typeface="JetBrains Mono" panose="02070609020202020204" pitchFamily="49" charset="0"/>
+                <a:ea typeface="+mn-ea"/>
+                <a:cs typeface="+mn-cs"/>
               </a:rPr>
               <a:t>PED</a:t>
             </a:r>
@@ -12989,7 +13151,9 @@
                 <a:solidFill>
                   <a:srgbClr val="F8FAFC"/>
                 </a:solidFill>
-                <a:latin typeface="Inter"/>
+                <a:latin typeface="Inter" panose="020B0604020202020204" pitchFamily="34" charset="0"/>
+                <a:ea typeface="+mn-ea"/>
+                <a:cs typeface="+mn-cs"/>
               </a:rPr>
               <a:t>Pedersen</a:t>
             </a:r>
@@ -13024,7 +13188,9 @@
                 <a:solidFill>
                   <a:srgbClr val="94A3B8"/>
                 </a:solidFill>
-                <a:latin typeface="JetBrains Mono"/>
+                <a:latin typeface="JetBrains Mono" panose="02070609020202020204" pitchFamily="49" charset="0"/>
+                <a:ea typeface="+mn-ea"/>
+                <a:cs typeface="+mn-cs"/>
               </a:rPr>
               <a:t>hash → commit</a:t>
             </a:r>
@@ -13106,7 +13272,9 @@
                 <a:solidFill>
                   <a:srgbClr val="F97316"/>
                 </a:solidFill>
-                <a:latin typeface="JetBrains Mono"/>
+                <a:latin typeface="JetBrains Mono" panose="02070609020202020204" pitchFamily="49" charset="0"/>
+                <a:ea typeface="+mn-ea"/>
+                <a:cs typeface="+mn-cs"/>
               </a:rPr>
               <a:t>NOIR</a:t>
             </a:r>
@@ -13141,7 +13309,9 @@
                 <a:solidFill>
                   <a:srgbClr val="F8FAFC"/>
                 </a:solidFill>
-                <a:latin typeface="Inter"/>
+                <a:latin typeface="Inter" panose="020B0604020202020204" pitchFamily="34" charset="0"/>
+                <a:ea typeface="+mn-ea"/>
+                <a:cs typeface="+mn-cs"/>
               </a:rPr>
               <a:t>Noir circuit</a:t>
             </a:r>
@@ -13176,7 +13346,9 @@
                 <a:solidFill>
                   <a:srgbClr val="94A3B8"/>
                 </a:solidFill>
-                <a:latin typeface="JetBrains Mono"/>
+                <a:latin typeface="JetBrains Mono" panose="02070609020202020204" pitchFamily="49" charset="0"/>
+                <a:ea typeface="+mn-ea"/>
+                <a:cs typeface="+mn-cs"/>
               </a:rPr>
               <a:t>board_validity</a:t>
             </a:r>
@@ -13258,7 +13430,9 @@
                 <a:solidFill>
                   <a:srgbClr val="F97316"/>
                 </a:solidFill>
-                <a:latin typeface="JetBrains Mono"/>
+                <a:latin typeface="JetBrains Mono" panose="02070609020202020204" pitchFamily="49" charset="0"/>
+                <a:ea typeface="+mn-ea"/>
+                <a:cs typeface="+mn-cs"/>
               </a:rPr>
               <a:t>HONK</a:t>
             </a:r>
@@ -13293,7 +13467,9 @@
                 <a:solidFill>
                   <a:srgbClr val="F8FAFC"/>
                 </a:solidFill>
-                <a:latin typeface="Inter"/>
+                <a:latin typeface="Inter" panose="020B0604020202020204" pitchFamily="34" charset="0"/>
+                <a:ea typeface="+mn-ea"/>
+                <a:cs typeface="+mn-cs"/>
               </a:rPr>
               <a:t>UltraHonk</a:t>
             </a:r>
@@ -13328,7 +13504,9 @@
                 <a:solidFill>
                   <a:srgbClr val="94A3B8"/>
                 </a:solidFill>
-                <a:latin typeface="JetBrains Mono"/>
+                <a:latin typeface="JetBrains Mono" panose="02070609020202020204" pitchFamily="49" charset="0"/>
+                <a:ea typeface="+mn-ea"/>
+                <a:cs typeface="+mn-cs"/>
               </a:rPr>
               <a:t>proof blob</a:t>
             </a:r>
@@ -13410,7 +13588,9 @@
                 <a:solidFill>
                   <a:srgbClr val="F97316"/>
                 </a:solidFill>
-                <a:latin typeface="JetBrains Mono"/>
+                <a:latin typeface="JetBrains Mono" panose="02070609020202020204" pitchFamily="49" charset="0"/>
+                <a:ea typeface="+mn-ea"/>
+                <a:cs typeface="+mn-cs"/>
               </a:rPr>
               <a:t>SOL</a:t>
             </a:r>
@@ -13445,7 +13625,9 @@
                 <a:solidFill>
                   <a:srgbClr val="F8FAFC"/>
                 </a:solidFill>
-                <a:latin typeface="Inter"/>
+                <a:latin typeface="Inter" panose="020B0604020202020204" pitchFamily="34" charset="0"/>
+                <a:ea typeface="+mn-ea"/>
+                <a:cs typeface="+mn-cs"/>
               </a:rPr>
               <a:t>HonkVerifier</a:t>
             </a:r>
@@ -13480,7 +13662,9 @@
                 <a:solidFill>
                   <a:srgbClr val="94A3B8"/>
                 </a:solidFill>
-                <a:latin typeface="JetBrains Mono"/>
+                <a:latin typeface="JetBrains Mono" panose="02070609020202020204" pitchFamily="49" charset="0"/>
+                <a:ea typeface="+mn-ea"/>
+                <a:cs typeface="+mn-cs"/>
               </a:rPr>
               <a:t>Solidity verify</a:t>
             </a:r>
@@ -13562,7 +13746,9 @@
                 <a:solidFill>
                   <a:srgbClr val="F97316"/>
                 </a:solidFill>
-                <a:latin typeface="JetBrains Mono"/>
+                <a:latin typeface="JetBrains Mono" panose="02070609020202020204" pitchFamily="49" charset="0"/>
+                <a:ea typeface="+mn-ea"/>
+                <a:cs typeface="+mn-cs"/>
               </a:rPr>
               <a:t>GAME</a:t>
             </a:r>
@@ -13597,7 +13783,9 @@
                 <a:solidFill>
                   <a:srgbClr val="F8FAFC"/>
                 </a:solidFill>
-                <a:latin typeface="Inter"/>
+                <a:latin typeface="Inter" panose="020B0604020202020204" pitchFamily="34" charset="0"/>
+                <a:ea typeface="+mn-ea"/>
+                <a:cs typeface="+mn-cs"/>
               </a:rPr>
               <a:t>BattleshipGame</a:t>
             </a:r>
@@ -13632,7 +13820,9 @@
                 <a:solidFill>
                   <a:srgbClr val="94A3B8"/>
                 </a:solidFill>
-                <a:latin typeface="JetBrains Mono"/>
+                <a:latin typeface="JetBrains Mono" panose="02070609020202020204" pitchFamily="49" charset="0"/>
+                <a:ea typeface="+mn-ea"/>
+                <a:cs typeface="+mn-cs"/>
               </a:rPr>
               <a:t>settle on-chain</a:t>
             </a:r>
@@ -13650,7 +13840,7 @@
             <a:off x="2260280.0" y="3154680"/>
             <a:ext cx="148915.0" cy="0"/>
           </a:xfrm>
-          <a:prstGeom prst="bentConnector3">
+          <a:prstGeom prst="line">
             <a:avLst/>
           </a:prstGeom>
           <a:ln w="22225">
@@ -13686,7 +13876,7 @@
             <a:off x="4140835.0" y="3154680"/>
             <a:ext cx="148915.0" cy="0"/>
           </a:xfrm>
-          <a:prstGeom prst="bentConnector3">
+          <a:prstGeom prst="line">
             <a:avLst/>
           </a:prstGeom>
           <a:ln w="22225">
@@ -13722,7 +13912,7 @@
             <a:off x="6021390.0" y="3154680"/>
             <a:ext cx="148915.0" cy="0"/>
           </a:xfrm>
-          <a:prstGeom prst="bentConnector3">
+          <a:prstGeom prst="line">
             <a:avLst/>
           </a:prstGeom>
           <a:ln w="22225">
@@ -13758,7 +13948,7 @@
             <a:off x="7901945.0" y="3154680"/>
             <a:ext cx="148915.0" cy="0"/>
           </a:xfrm>
-          <a:prstGeom prst="bentConnector3">
+          <a:prstGeom prst="line">
             <a:avLst/>
           </a:prstGeom>
           <a:ln w="22225">
@@ -13794,7 +13984,7 @@
             <a:off x="9782500.0" y="3154680"/>
             <a:ext cx="148915.0" cy="0"/>
           </a:xfrm>
-          <a:prstGeom prst="bentConnector3">
+          <a:prstGeom prst="line">
             <a:avLst/>
           </a:prstGeom>
           <a:ln w="22225">
@@ -13847,7 +14037,9 @@
                 <a:solidFill>
                   <a:srgbClr val="94A3B8"/>
                 </a:solidFill>
-                <a:latin typeface="Inter"/>
+                <a:latin typeface="Inter" panose="020B0604020202020204" pitchFamily="34" charset="0"/>
+                <a:ea typeface="+mn-ea"/>
+                <a:cs typeface="+mn-cs"/>
               </a:rPr>
               <a:t>BROWSER  →  WASM PROVER  →  NOIR  →  SOLIDITY VERIFIER  →  CHAIN</a:t>
             </a:r>
@@ -13882,7 +14074,9 @@
                 <a:solidFill>
                   <a:srgbClr val="38BDF8"/>
                 </a:solidFill>
-                <a:latin typeface="Inter"/>
+                <a:latin typeface="Inter" panose="020B0604020202020204" pitchFamily="34" charset="0"/>
+                <a:ea typeface="+mn-ea"/>
+                <a:cs typeface="+mn-cs"/>
               </a:rPr>
               <a:t>·</a:t>
             </a:r>
@@ -13917,7 +14111,9 @@
                 <a:solidFill>
                   <a:srgbClr val="F8FAFC"/>
                 </a:solidFill>
-                <a:latin typeface="Inter"/>
+                <a:latin typeface="Inter" panose="020B0604020202020204" pitchFamily="34" charset="0"/>
+                <a:ea typeface="+mn-ea"/>
+                <a:cs typeface="+mn-cs"/>
               </a:rPr>
               <a:t>Browser proves, chain verifies</a:t>
             </a:r>
@@ -13952,7 +14148,9 @@
                 <a:solidFill>
                   <a:srgbClr val="F97316"/>
                 </a:solidFill>
-                <a:latin typeface="Inter"/>
+                <a:latin typeface="Inter" panose="020B0604020202020204" pitchFamily="34" charset="0"/>
+                <a:ea typeface="+mn-ea"/>
+                <a:cs typeface="+mn-cs"/>
               </a:rPr>
               <a:t>·</a:t>
             </a:r>
@@ -13987,7 +14185,9 @@
                 <a:solidFill>
                   <a:srgbClr val="F8FAFC"/>
                 </a:solidFill>
-                <a:latin typeface="Inter"/>
+                <a:latin typeface="Inter" panose="020B0604020202020204" pitchFamily="34" charset="0"/>
+                <a:ea typeface="+mn-ea"/>
+                <a:cs typeface="+mn-cs"/>
               </a:rPr>
               <a:t>Burner wallets sign, zero popups</a:t>
             </a:r>
@@ -14022,7 +14222,9 @@
                 <a:solidFill>
                   <a:srgbClr val="4ADE80"/>
                 </a:solidFill>
-                <a:latin typeface="Inter"/>
+                <a:latin typeface="Inter" panose="020B0604020202020204" pitchFamily="34" charset="0"/>
+                <a:ea typeface="+mn-ea"/>
+                <a:cs typeface="+mn-cs"/>
               </a:rPr>
               <a:t>·</a:t>
             </a:r>
@@ -14057,7 +14259,9 @@
                 <a:solidFill>
                   <a:srgbClr val="F8FAFC"/>
                 </a:solidFill>
-                <a:latin typeface="Inter"/>
+                <a:latin typeface="Inter" panose="020B0604020202020204" pitchFamily="34" charset="0"/>
+                <a:ea typeface="+mn-ea"/>
+                <a:cs typeface="+mn-cs"/>
               </a:rPr>
               <a:t>Local Anvil for instant demo</a:t>
             </a:r>
@@ -14153,7 +14357,9 @@
                 <a:solidFill>
                   <a:srgbClr val="38BDF8"/>
                 </a:solidFill>
-                <a:latin typeface="Inter"/>
+                <a:latin typeface="Inter" panose="020B0604020202020204" pitchFamily="34" charset="0"/>
+                <a:ea typeface="+mn-ea"/>
+                <a:cs typeface="+mn-cs"/>
               </a:rPr>
               <a:t>06  ·  SWITCH TO THE BROWSER</a:t>
             </a:r>
@@ -14188,7 +14394,9 @@
                 <a:solidFill>
                   <a:srgbClr val="F97316"/>
                 </a:solidFill>
-                <a:latin typeface="Inter"/>
+                <a:latin typeface="Inter" panose="020B0604020202020204" pitchFamily="34" charset="0"/>
+                <a:ea typeface="+mn-ea"/>
+                <a:cs typeface="+mn-cs"/>
               </a:rPr>
               <a:t>LIVE DEMO  →</a:t>
             </a:r>
@@ -14223,7 +14431,9 @@
                 <a:solidFill>
                   <a:srgbClr val="F8FAFC"/>
                 </a:solidFill>
-                <a:latin typeface="JetBrains Mono"/>
+                <a:latin typeface="JetBrains Mono" panose="02070609020202020204" pitchFamily="49" charset="0"/>
+                <a:ea typeface="+mn-ea"/>
+                <a:cs typeface="+mn-cs"/>
               </a:rPr>
               <a:t>http://localhost:5173</a:t>
             </a:r>
@@ -14258,7 +14468,9 @@
                 <a:solidFill>
                   <a:srgbClr val="94A3B8"/>
                 </a:solidFill>
-                <a:latin typeface="Inter"/>
+                <a:latin typeface="Inter" panose="020B0604020202020204" pitchFamily="34" charset="0"/>
+                <a:ea typeface="+mn-ea"/>
+                <a:cs typeface="+mn-cs"/>
               </a:rPr>
               <a:t>two burner wallets  ·  one laptop  ·  zero trust</a:t>
             </a:r>
@@ -14292,7 +14504,9 @@
                 <a:solidFill>
                   <a:srgbClr val="94A3B8"/>
                 </a:solidFill>
-                <a:latin typeface="JetBrains Mono"/>
+                <a:latin typeface="JetBrains Mono" panose="02070609020202020204" pitchFamily="49" charset="0"/>
+                <a:ea typeface="+mn-ea"/>
+                <a:cs typeface="+mn-cs"/>
               </a:rPr>
               <a:t>battleship</a:t>
             </a:r>
@@ -14301,7 +14515,9 @@
                 <a:solidFill>
                   <a:srgbClr val="F97316"/>
                 </a:solidFill>
-                <a:latin typeface="JetBrains Mono"/>
+                <a:latin typeface="JetBrains Mono" panose="02070609020202020204" pitchFamily="49" charset="0"/>
+                <a:ea typeface="+mn-ea"/>
+                <a:cs typeface="+mn-cs"/>
               </a:rPr>
               <a:t>.zk</a:t>
             </a:r>
@@ -14422,7 +14638,9 @@
                 <a:solidFill>
                   <a:srgbClr val="94A3B8"/>
                 </a:solidFill>
-                <a:latin typeface="JetBrains Mono"/>
+                <a:latin typeface="JetBrains Mono" panose="02070609020202020204" pitchFamily="49" charset="0"/>
+                <a:ea typeface="+mn-ea"/>
+                <a:cs typeface="+mn-cs"/>
               </a:rPr>
               <a:t>07 / 09</a:t>
             </a:r>
@@ -14518,7 +14736,9 @@
                 <a:solidFill>
                   <a:srgbClr val="38BDF8"/>
                 </a:solidFill>
-                <a:latin typeface="Inter"/>
+                <a:latin typeface="Inter" panose="020B0604020202020204" pitchFamily="34" charset="0"/>
+                <a:ea typeface="+mn-ea"/>
+                <a:cs typeface="+mn-cs"/>
               </a:rPr>
               <a:t>07  ·  RECAP</a:t>
             </a:r>
@@ -14553,7 +14773,9 @@
                 <a:solidFill>
                   <a:srgbClr val="F8FAFC"/>
                 </a:solidFill>
-                <a:latin typeface="Inter"/>
+                <a:latin typeface="Inter" panose="020B0604020202020204" pitchFamily="34" charset="0"/>
+                <a:ea typeface="+mn-ea"/>
+                <a:cs typeface="+mn-cs"/>
               </a:rPr>
               <a:t>What was proven on-chain.</a:t>
             </a:r>
@@ -14630,7 +14852,9 @@
                 <a:solidFill>
                   <a:srgbClr val="94A3B8"/>
                 </a:solidFill>
-                <a:latin typeface="JetBrains Mono"/>
+                <a:latin typeface="JetBrains Mono" panose="02070609020202020204" pitchFamily="49" charset="0"/>
+                <a:ea typeface="+mn-ea"/>
+                <a:cs typeface="+mn-cs"/>
               </a:rPr>
               <a:t>battleship</a:t>
             </a:r>
@@ -14639,7 +14863,9 @@
                 <a:solidFill>
                   <a:srgbClr val="F97316"/>
                 </a:solidFill>
-                <a:latin typeface="JetBrains Mono"/>
+                <a:latin typeface="JetBrains Mono" panose="02070609020202020204" pitchFamily="49" charset="0"/>
+                <a:ea typeface="+mn-ea"/>
+                <a:cs typeface="+mn-cs"/>
               </a:rPr>
               <a:t>.zk</a:t>
             </a:r>
@@ -14760,7 +14986,9 @@
                 <a:solidFill>
                   <a:srgbClr val="94A3B8"/>
                 </a:solidFill>
-                <a:latin typeface="JetBrains Mono"/>
+                <a:latin typeface="JetBrains Mono" panose="02070609020202020204" pitchFamily="49" charset="0"/>
+                <a:ea typeface="+mn-ea"/>
+                <a:cs typeface="+mn-cs"/>
               </a:rPr>
               <a:t>08 / 09</a:t>
             </a:r>
@@ -14838,7 +15066,9 @@
                 <a:solidFill>
                   <a:srgbClr val="0A0F1A"/>
                 </a:solidFill>
-                <a:latin typeface="Inter"/>
+                <a:latin typeface="Inter" panose="020B0604020202020204" pitchFamily="34" charset="0"/>
+                <a:ea typeface="+mn-ea"/>
+                <a:cs typeface="+mn-cs"/>
               </a:rPr>
               <a:t>1</a:t>
             </a:r>
@@ -14873,7 +15103,9 @@
                 <a:solidFill>
                   <a:srgbClr val="F8FAFC"/>
                 </a:solidFill>
-                <a:latin typeface="Inter"/>
+                <a:latin typeface="Inter" panose="020B0604020202020204" pitchFamily="34" charset="0"/>
+                <a:ea typeface="+mn-ea"/>
+                <a:cs typeface="+mn-cs"/>
               </a:rPr>
               <a:t>Board legality before the first shot</a:t>
             </a:r>
@@ -14908,7 +15140,9 @@
                 <a:solidFill>
                   <a:srgbClr val="94A3B8"/>
                 </a:solidFill>
-                <a:latin typeface="Inter"/>
+                <a:latin typeface="Inter" panose="020B0604020202020204" pitchFamily="34" charset="0"/>
+                <a:ea typeface="+mn-ea"/>
+                <a:cs typeface="+mn-cs"/>
               </a:rPr>
               <a:t>Can't commit an all-empty board. The circuit rejects it.</a:t>
             </a:r>
@@ -14986,7 +15220,9 @@
                 <a:solidFill>
                   <a:srgbClr val="0A0F1A"/>
                 </a:solidFill>
-                <a:latin typeface="Inter"/>
+                <a:latin typeface="Inter" panose="020B0604020202020204" pitchFamily="34" charset="0"/>
+                <a:ea typeface="+mn-ea"/>
+                <a:cs typeface="+mn-cs"/>
               </a:rPr>
               <a:t>2</a:t>
             </a:r>
@@ -15021,7 +15257,9 @@
                 <a:solidFill>
                   <a:srgbClr val="F8FAFC"/>
                 </a:solidFill>
-                <a:latin typeface="Inter"/>
+                <a:latin typeface="Inter" panose="020B0604020202020204" pitchFamily="34" charset="0"/>
+                <a:ea typeface="+mn-ea"/>
+                <a:cs typeface="+mn-cs"/>
               </a:rPr>
               <a:t>Every shot response consistent with the committed board</a:t>
             </a:r>
@@ -15056,7 +15294,9 @@
                 <a:solidFill>
                   <a:srgbClr val="94A3B8"/>
                 </a:solidFill>
-                <a:latin typeface="Inter"/>
+                <a:latin typeface="Inter" panose="020B0604020202020204" pitchFamily="34" charset="0"/>
+                <a:ea typeface="+mn-ea"/>
+                <a:cs typeface="+mn-cs"/>
               </a:rPr>
               <a:t>Hit or miss, bound back to the original Pedersen commitment.</a:t>
             </a:r>
@@ -15134,7 +15374,9 @@
                 <a:solidFill>
                   <a:srgbClr val="0A0F1A"/>
                 </a:solidFill>
-                <a:latin typeface="Inter"/>
+                <a:latin typeface="Inter" panose="020B0604020202020204" pitchFamily="34" charset="0"/>
+                <a:ea typeface="+mn-ea"/>
+                <a:cs typeface="+mn-cs"/>
               </a:rPr>
               <a:t>3</a:t>
             </a:r>
@@ -15169,7 +15411,9 @@
                 <a:solidFill>
                   <a:srgbClr val="F8FAFC"/>
                 </a:solidFill>
-                <a:latin typeface="Inter"/>
+                <a:latin typeface="Inter" panose="020B0604020202020204" pitchFamily="34" charset="0"/>
+                <a:ea typeface="+mn-ea"/>
+                <a:cs typeface="+mn-cs"/>
               </a:rPr>
               <a:t>Zero trust in the opponent's claims</a:t>
             </a:r>
@@ -15204,7 +15448,9 @@
                 <a:solidFill>
                   <a:srgbClr val="94A3B8"/>
                 </a:solidFill>
-                <a:latin typeface="Inter"/>
+                <a:latin typeface="Inter" panose="020B0604020202020204" pitchFamily="34" charset="0"/>
+                <a:ea typeface="+mn-ea"/>
+                <a:cs typeface="+mn-cs"/>
               </a:rPr>
               <a:t>Every answer is a proof the contract verifies, not a promise.</a:t>
             </a:r>
@@ -15282,7 +15528,9 @@
                 <a:solidFill>
                   <a:srgbClr val="0A0F1A"/>
                 </a:solidFill>
-                <a:latin typeface="Inter"/>
+                <a:latin typeface="Inter" panose="020B0604020202020204" pitchFamily="34" charset="0"/>
+                <a:ea typeface="+mn-ea"/>
+                <a:cs typeface="+mn-cs"/>
               </a:rPr>
               <a:t>4</a:t>
             </a:r>
@@ -15317,7 +15565,9 @@
                 <a:solidFill>
                   <a:srgbClr val="F8FAFC"/>
                 </a:solidFill>
-                <a:latin typeface="Inter"/>
+                <a:latin typeface="Inter" panose="020B0604020202020204" pitchFamily="34" charset="0"/>
+                <a:ea typeface="+mn-ea"/>
+                <a:cs typeface="+mn-cs"/>
               </a:rPr>
               <a:t>Zero trusted-setup ceremony</a:t>
             </a:r>
@@ -15352,7 +15602,9 @@
                 <a:solidFill>
                   <a:srgbClr val="94A3B8"/>
                 </a:solidFill>
-                <a:latin typeface="Inter"/>
+                <a:latin typeface="Inter" panose="020B0604020202020204" pitchFamily="34" charset="0"/>
+                <a:ea typeface="+mn-ea"/>
+                <a:cs typeface="+mn-cs"/>
               </a:rPr>
               <a:t>UltraHonk means no multi-party ritual, no toxic waste.</a:t>
             </a:r>
@@ -15448,7 +15700,9 @@
                 <a:solidFill>
                   <a:srgbClr val="38BDF8"/>
                 </a:solidFill>
-                <a:latin typeface="Inter"/>
+                <a:latin typeface="Inter" panose="020B0604020202020204" pitchFamily="34" charset="0"/>
+                <a:ea typeface="+mn-ea"/>
+                <a:cs typeface="+mn-cs"/>
               </a:rPr>
               <a:t>08  ·  NEXT + Q&amp;A</a:t>
             </a:r>
@@ -15483,7 +15737,9 @@
                 <a:solidFill>
                   <a:srgbClr val="F8FAFC"/>
                 </a:solidFill>
-                <a:latin typeface="Inter"/>
+                <a:latin typeface="Inter" panose="020B0604020202020204" pitchFamily="34" charset="0"/>
+                <a:ea typeface="+mn-ea"/>
+                <a:cs typeface="+mn-cs"/>
               </a:rPr>
               <a:t>What's next.</a:t>
             </a:r>
@@ -15560,7 +15816,9 @@
                 <a:solidFill>
                   <a:srgbClr val="94A3B8"/>
                 </a:solidFill>
-                <a:latin typeface="JetBrains Mono"/>
+                <a:latin typeface="JetBrains Mono" panose="02070609020202020204" pitchFamily="49" charset="0"/>
+                <a:ea typeface="+mn-ea"/>
+                <a:cs typeface="+mn-cs"/>
               </a:rPr>
               <a:t>battleship</a:t>
             </a:r>
@@ -15569,7 +15827,9 @@
                 <a:solidFill>
                   <a:srgbClr val="F97316"/>
                 </a:solidFill>
-                <a:latin typeface="JetBrains Mono"/>
+                <a:latin typeface="JetBrains Mono" panose="02070609020202020204" pitchFamily="49" charset="0"/>
+                <a:ea typeface="+mn-ea"/>
+                <a:cs typeface="+mn-cs"/>
               </a:rPr>
               <a:t>.zk</a:t>
             </a:r>
@@ -15690,7 +15950,9 @@
                 <a:solidFill>
                   <a:srgbClr val="94A3B8"/>
                 </a:solidFill>
-                <a:latin typeface="JetBrains Mono"/>
+                <a:latin typeface="JetBrains Mono" panose="02070609020202020204" pitchFamily="49" charset="0"/>
+                <a:ea typeface="+mn-ea"/>
+                <a:cs typeface="+mn-cs"/>
               </a:rPr>
               <a:t>09 / 09</a:t>
             </a:r>
@@ -15725,7 +15987,9 @@
                 <a:solidFill>
                   <a:srgbClr val="F97316"/>
                 </a:solidFill>
-                <a:latin typeface="JetBrains Mono"/>
+                <a:latin typeface="JetBrains Mono" panose="02070609020202020204" pitchFamily="49" charset="0"/>
+                <a:ea typeface="+mn-ea"/>
+                <a:cs typeface="+mn-cs"/>
               </a:rPr>
               <a:t>01</a:t>
             </a:r>
@@ -15760,7 +16024,9 @@
                 <a:solidFill>
                   <a:srgbClr val="F8FAFC"/>
                 </a:solidFill>
-                <a:latin typeface="Inter"/>
+                <a:latin typeface="Inter" panose="020B0604020202020204" pitchFamily="34" charset="0"/>
+                <a:ea typeface="+mn-ea"/>
+                <a:cs typeface="+mn-cs"/>
               </a:rPr>
               <a:t>Mainnet deployment path</a:t>
             </a:r>
@@ -15795,7 +16061,9 @@
                 <a:solidFill>
                   <a:srgbClr val="94A3B8"/>
                 </a:solidFill>
-                <a:latin typeface="Inter"/>
+                <a:latin typeface="Inter" panose="020B0604020202020204" pitchFamily="34" charset="0"/>
+                <a:ea typeface="+mn-ea"/>
+                <a:cs typeface="+mn-cs"/>
               </a:rPr>
               <a:t>Solidity verifier is deploy-ready.</a:t>
             </a:r>
@@ -15830,7 +16098,9 @@
                 <a:solidFill>
                   <a:srgbClr val="F97316"/>
                 </a:solidFill>
-                <a:latin typeface="JetBrains Mono"/>
+                <a:latin typeface="JetBrains Mono" panose="02070609020202020204" pitchFamily="49" charset="0"/>
+                <a:ea typeface="+mn-ea"/>
+                <a:cs typeface="+mn-cs"/>
               </a:rPr>
               <a:t>02</a:t>
             </a:r>
@@ -15865,7 +16135,9 @@
                 <a:solidFill>
                   <a:srgbClr val="F8FAFC"/>
                 </a:solidFill>
-                <a:latin typeface="Inter"/>
+                <a:latin typeface="Inter" panose="020B0604020202020204" pitchFamily="34" charset="0"/>
+                <a:ea typeface="+mn-ea"/>
+                <a:cs typeface="+mn-cs"/>
               </a:rPr>
               <a:t>Circuit optimization</a:t>
             </a:r>
@@ -15900,7 +16172,9 @@
                 <a:solidFill>
                   <a:srgbClr val="94A3B8"/>
                 </a:solidFill>
-                <a:latin typeface="Inter"/>
+                <a:latin typeface="Inter" panose="020B0604020202020204" pitchFamily="34" charset="0"/>
+                <a:ea typeface="+mn-ea"/>
+                <a:cs typeface="+mn-cs"/>
               </a:rPr>
               <a:t>Shrink shot-response constraints.</a:t>
             </a:r>
@@ -15935,7 +16209,9 @@
                 <a:solidFill>
                   <a:srgbClr val="F97316"/>
                 </a:solidFill>
-                <a:latin typeface="JetBrains Mono"/>
+                <a:latin typeface="JetBrains Mono" panose="02070609020202020204" pitchFamily="49" charset="0"/>
+                <a:ea typeface="+mn-ea"/>
+                <a:cs typeface="+mn-cs"/>
               </a:rPr>
               <a:t>03</a:t>
             </a:r>
@@ -15970,7 +16246,9 @@
                 <a:solidFill>
                   <a:srgbClr val="F8FAFC"/>
                 </a:solidFill>
-                <a:latin typeface="Inter"/>
+                <a:latin typeface="Inter" panose="020B0604020202020204" pitchFamily="34" charset="0"/>
+                <a:ea typeface="+mn-ea"/>
+                <a:cs typeface="+mn-cs"/>
               </a:rPr>
               <a:t>Multi-game lobby</a:t>
             </a:r>
@@ -16005,7 +16283,9 @@
                 <a:solidFill>
                   <a:srgbClr val="94A3B8"/>
                 </a:solidFill>
-                <a:latin typeface="Inter"/>
+                <a:latin typeface="Inter" panose="020B0604020202020204" pitchFamily="34" charset="0"/>
+                <a:ea typeface="+mn-ea"/>
+                <a:cs typeface="+mn-cs"/>
               </a:rPr>
               <a:t>Matchmaking plus state routing.</a:t>
             </a:r>
@@ -16083,7 +16363,9 @@
                 <a:solidFill>
                   <a:srgbClr val="38BDF8"/>
                 </a:solidFill>
-                <a:latin typeface="Inter"/>
+                <a:latin typeface="Inter" panose="020B0604020202020204" pitchFamily="34" charset="0"/>
+                <a:ea typeface="+mn-ea"/>
+                <a:cs typeface="+mn-cs"/>
               </a:rPr>
               <a:t>Q &amp; A</a:t>
             </a:r>
@@ -16118,7 +16400,9 @@
                 <a:solidFill>
                   <a:srgbClr val="F97316"/>
                 </a:solidFill>
-                <a:latin typeface="Inter"/>
+                <a:latin typeface="Inter" panose="020B0604020202020204" pitchFamily="34" charset="0"/>
+                <a:ea typeface="+mn-ea"/>
+                <a:cs typeface="+mn-cs"/>
               </a:rPr>
               <a:t>Questions?</a:t>
             </a:r>
@@ -16153,7 +16437,9 @@
                 <a:solidFill>
                   <a:srgbClr val="94A3B8"/>
                 </a:solidFill>
-                <a:latin typeface="Inter"/>
+                <a:latin typeface="Inter" panose="020B0604020202020204" pitchFamily="34" charset="0"/>
+                <a:ea typeface="+mn-ea"/>
+                <a:cs typeface="+mn-cs"/>
               </a:rPr>
               <a:t>Circuits, contracts, frontend -- everything is open source.</a:t>
             </a:r>
@@ -16188,7 +16474,9 @@
                 <a:solidFill>
                   <a:srgbClr val="F8FAFC"/>
                 </a:solidFill>
-                <a:latin typeface="JetBrains Mono"/>
+                <a:latin typeface="JetBrains Mono" panose="02070609020202020204" pitchFamily="49" charset="0"/>
+                <a:ea typeface="+mn-ea"/>
+                <a:cs typeface="+mn-cs"/>
               </a:rPr>
               <a:t>github.com/ battleship-zk</a:t>
             </a:r>
